--- a/Section_03_Data_Modeling_Schema_Design_Validation/Lesson_027_Deriving_Data_Structure_from_Requirements/ppt/Lesson_027_Deriving_Data_Structure_from_Requirements.pptx
+++ b/Section_03_Data_Modeling_Schema_Design_Validation/Lesson_027_Deriving_Data_Structure_from_Requirements/ppt/Lesson_027_Deriving_Data_Structure_from_Requirements.pptx
@@ -312,7 +312,7 @@
           <a:p>
             <a:fld id="{5BCAD085-E8A6-8845-BD4E-CB4CCA059FC4}" type="datetimeFigureOut">
               <a:rPr lang="en-US" smtClean="0"/>
-              <a:t>10/2/2026</a:t>
+              <a:t>10/5/2026</a:t>
             </a:fld>
             <a:endParaRPr lang="en-US"/>
           </a:p>
@@ -480,7 +480,7 @@
           <a:p>
             <a:fld id="{5BCAD085-E8A6-8845-BD4E-CB4CCA059FC4}" type="datetimeFigureOut">
               <a:rPr lang="en-US" smtClean="0"/>
-              <a:t>10/2/2026</a:t>
+              <a:t>10/5/2026</a:t>
             </a:fld>
             <a:endParaRPr lang="en-US"/>
           </a:p>
@@ -658,7 +658,7 @@
           <a:p>
             <a:fld id="{5BCAD085-E8A6-8845-BD4E-CB4CCA059FC4}" type="datetimeFigureOut">
               <a:rPr lang="en-US" smtClean="0"/>
-              <a:t>10/2/2026</a:t>
+              <a:t>10/5/2026</a:t>
             </a:fld>
             <a:endParaRPr lang="en-US"/>
           </a:p>
@@ -826,7 +826,7 @@
           <a:p>
             <a:fld id="{5BCAD085-E8A6-8845-BD4E-CB4CCA059FC4}" type="datetimeFigureOut">
               <a:rPr lang="en-US" smtClean="0"/>
-              <a:t>10/2/2026</a:t>
+              <a:t>10/5/2026</a:t>
             </a:fld>
             <a:endParaRPr lang="en-US"/>
           </a:p>
@@ -1071,7 +1071,7 @@
           <a:p>
             <a:fld id="{5BCAD085-E8A6-8845-BD4E-CB4CCA059FC4}" type="datetimeFigureOut">
               <a:rPr lang="en-US" smtClean="0"/>
-              <a:t>10/2/2026</a:t>
+              <a:t>10/5/2026</a:t>
             </a:fld>
             <a:endParaRPr lang="en-US"/>
           </a:p>
@@ -1356,7 +1356,7 @@
           <a:p>
             <a:fld id="{5BCAD085-E8A6-8845-BD4E-CB4CCA059FC4}" type="datetimeFigureOut">
               <a:rPr lang="en-US" smtClean="0"/>
-              <a:t>10/2/2026</a:t>
+              <a:t>10/5/2026</a:t>
             </a:fld>
             <a:endParaRPr lang="en-US"/>
           </a:p>
@@ -1775,7 +1775,7 @@
           <a:p>
             <a:fld id="{5BCAD085-E8A6-8845-BD4E-CB4CCA059FC4}" type="datetimeFigureOut">
               <a:rPr lang="en-US" smtClean="0"/>
-              <a:t>10/2/2026</a:t>
+              <a:t>10/5/2026</a:t>
             </a:fld>
             <a:endParaRPr lang="en-US"/>
           </a:p>
@@ -1892,7 +1892,7 @@
           <a:p>
             <a:fld id="{5BCAD085-E8A6-8845-BD4E-CB4CCA059FC4}" type="datetimeFigureOut">
               <a:rPr lang="en-US" smtClean="0"/>
-              <a:t>10/2/2026</a:t>
+              <a:t>10/5/2026</a:t>
             </a:fld>
             <a:endParaRPr lang="en-US"/>
           </a:p>
@@ -1987,7 +1987,7 @@
           <a:p>
             <a:fld id="{5BCAD085-E8A6-8845-BD4E-CB4CCA059FC4}" type="datetimeFigureOut">
               <a:rPr lang="en-US" smtClean="0"/>
-              <a:t>10/2/2026</a:t>
+              <a:t>10/5/2026</a:t>
             </a:fld>
             <a:endParaRPr lang="en-US"/>
           </a:p>
@@ -2262,7 +2262,7 @@
           <a:p>
             <a:fld id="{5BCAD085-E8A6-8845-BD4E-CB4CCA059FC4}" type="datetimeFigureOut">
               <a:rPr lang="en-US" smtClean="0"/>
-              <a:t>10/2/2026</a:t>
+              <a:t>10/5/2026</a:t>
             </a:fld>
             <a:endParaRPr lang="en-US"/>
           </a:p>
@@ -2514,7 +2514,7 @@
           <a:p>
             <a:fld id="{5BCAD085-E8A6-8845-BD4E-CB4CCA059FC4}" type="datetimeFigureOut">
               <a:rPr lang="en-US" smtClean="0"/>
-              <a:t>10/2/2026</a:t>
+              <a:t>10/5/2026</a:t>
             </a:fld>
             <a:endParaRPr lang="en-US"/>
           </a:p>
@@ -2725,7 +2725,7 @@
           <a:p>
             <a:fld id="{5BCAD085-E8A6-8845-BD4E-CB4CCA059FC4}" type="datetimeFigureOut">
               <a:rPr lang="en-US" smtClean="0"/>
-              <a:t>10/2/2026</a:t>
+              <a:t>10/5/2026</a:t>
             </a:fld>
             <a:endParaRPr lang="en-US"/>
           </a:p>
@@ -3117,7 +3117,7 @@
         <p:spPr>
           <a:xfrm>
             <a:off x="411480" y="201168"/>
-            <a:ext cx="10972800" cy="502920"/>
+            <a:ext cx="5362365" cy="553998"/>
           </a:xfrm>
           <a:prstGeom prst="rect">
             <a:avLst/>
@@ -3131,22 +3131,13 @@
           <a:lstStyle/>
           <a:p>
             <a:r>
-              <a:rPr sz="3000" b="1">
-                <a:solidFill>
-                  <a:srgbClr val="FF9100"/>
+              <a:rPr sz="3000" b="1" dirty="0">
+                <a:solidFill>
+                  <a:srgbClr val="F5F7F9"/>
                 </a:solidFill>
                 <a:latin typeface="Aptos Display"/>
               </a:rPr>
-              <a:t>Key Takeaways</a:t>
-            </a:r>
-            <a:r>
-              <a:rPr sz="3000" b="1">
-                <a:solidFill>
-                  <a:srgbClr val="F5F7F9"/>
-                </a:solidFill>
-                <a:latin typeface="Aptos Display"/>
-              </a:rPr>
-              <a:t> — Requirements to Data Structure</a:t>
+              <a:t>Requirements to Data Structure</a:t>
             </a:r>
           </a:p>
         </p:txBody>
@@ -11649,7 +11640,7 @@
         </p:nvSpPr>
         <p:spPr>
           <a:xfrm>
-            <a:off x="548640" y="1417320"/>
+            <a:off x="621792" y="1417320"/>
             <a:ext cx="2606040" cy="3337560"/>
           </a:xfrm>
           <a:prstGeom prst="roundRect">
@@ -11835,7 +11826,7 @@
         </p:nvSpPr>
         <p:spPr>
           <a:xfrm>
-            <a:off x="1143000" y="3712463"/>
+            <a:off x="1275588" y="3767328"/>
             <a:ext cx="685800" cy="164592"/>
           </a:xfrm>
           <a:prstGeom prst="rect">
@@ -12067,7 +12058,7 @@
         </p:nvSpPr>
         <p:spPr>
           <a:xfrm>
-            <a:off x="4023360" y="3712463"/>
+            <a:off x="4105656" y="3758182"/>
             <a:ext cx="1143000" cy="164592"/>
           </a:xfrm>
           <a:prstGeom prst="rect">
@@ -12299,7 +12290,7 @@
         </p:nvSpPr>
         <p:spPr>
           <a:xfrm>
-            <a:off x="6903720" y="3712463"/>
+            <a:off x="7086600" y="3767328"/>
             <a:ext cx="1691640" cy="164592"/>
           </a:xfrm>
           <a:prstGeom prst="rect">
@@ -12496,7 +12487,7 @@
         </p:nvSpPr>
         <p:spPr>
           <a:xfrm>
-            <a:off x="9345167" y="3730752"/>
+            <a:off x="9189719" y="3721606"/>
             <a:ext cx="914400" cy="201168"/>
           </a:xfrm>
           <a:prstGeom prst="rect">
@@ -12512,7 +12503,7 @@
           <a:p>
             <a:pPr algn="l"/>
             <a:r>
-              <a:rPr sz="900" b="1">
+              <a:rPr sz="900" b="1" dirty="0">
                 <a:solidFill>
                   <a:srgbClr val="AAB2B9"/>
                 </a:solidFill>
@@ -12531,7 +12522,7 @@
         </p:nvSpPr>
         <p:spPr>
           <a:xfrm>
-            <a:off x="9784080" y="3712463"/>
+            <a:off x="9692640" y="3749038"/>
             <a:ext cx="2240280" cy="164592"/>
           </a:xfrm>
           <a:prstGeom prst="rect">
@@ -13987,7 +13978,7 @@
         </p:nvSpPr>
         <p:spPr>
           <a:xfrm>
-            <a:off x="841248" y="2212848"/>
+            <a:off x="868680" y="2359152"/>
             <a:ext cx="1792224" cy="246888"/>
           </a:xfrm>
           <a:prstGeom prst="rect">
@@ -14003,7 +13994,7 @@
           <a:p>
             <a:pPr algn="ctr"/>
             <a:r>
-              <a:rPr sz="1100" b="0">
+              <a:rPr sz="1100" b="0" dirty="0">
                 <a:solidFill>
                   <a:srgbClr val="AAB2B9"/>
                 </a:solidFill>
